--- a/ECON251/Assignment/presentation template.pptx
+++ b/ECON251/Assignment/presentation template.pptx
@@ -1947,7 +1947,7 @@
           <a:p>
             <a:fld id="{4C356D4C-ADF5-4911-B329-3D82610630F0}" type="datetimeFigureOut">
               <a:rPr lang="en-SG" smtClean="0"/>
-              <a:t>22/7/2026</a:t>
+              <a:t>2/8/2026</a:t>
             </a:fld>
             <a:endParaRPr lang="en-SG" dirty="0"/>
           </a:p>
@@ -2147,7 +2147,7 @@
           <a:p>
             <a:fld id="{4C356D4C-ADF5-4911-B329-3D82610630F0}" type="datetimeFigureOut">
               <a:rPr lang="en-SG" smtClean="0"/>
-              <a:t>22/7/2026</a:t>
+              <a:t>2/8/2026</a:t>
             </a:fld>
             <a:endParaRPr lang="en-SG" dirty="0"/>
           </a:p>
@@ -2357,7 +2357,7 @@
           <a:p>
             <a:fld id="{4C356D4C-ADF5-4911-B329-3D82610630F0}" type="datetimeFigureOut">
               <a:rPr lang="en-SG" smtClean="0"/>
-              <a:t>22/7/2026</a:t>
+              <a:t>2/8/2026</a:t>
             </a:fld>
             <a:endParaRPr lang="en-SG" dirty="0"/>
           </a:p>
@@ -2557,7 +2557,7 @@
           <a:p>
             <a:fld id="{4C356D4C-ADF5-4911-B329-3D82610630F0}" type="datetimeFigureOut">
               <a:rPr lang="en-SG" smtClean="0"/>
-              <a:t>22/7/2026</a:t>
+              <a:t>2/8/2026</a:t>
             </a:fld>
             <a:endParaRPr lang="en-SG" dirty="0"/>
           </a:p>
@@ -2833,7 +2833,7 @@
           <a:p>
             <a:fld id="{4C356D4C-ADF5-4911-B329-3D82610630F0}" type="datetimeFigureOut">
               <a:rPr lang="en-SG" smtClean="0"/>
-              <a:t>22/7/2026</a:t>
+              <a:t>2/8/2026</a:t>
             </a:fld>
             <a:endParaRPr lang="en-SG" dirty="0"/>
           </a:p>
@@ -3101,7 +3101,7 @@
           <a:p>
             <a:fld id="{4C356D4C-ADF5-4911-B329-3D82610630F0}" type="datetimeFigureOut">
               <a:rPr lang="en-SG" smtClean="0"/>
-              <a:t>22/7/2026</a:t>
+              <a:t>2/8/2026</a:t>
             </a:fld>
             <a:endParaRPr lang="en-SG" dirty="0"/>
           </a:p>
@@ -3516,7 +3516,7 @@
           <a:p>
             <a:fld id="{4C356D4C-ADF5-4911-B329-3D82610630F0}" type="datetimeFigureOut">
               <a:rPr lang="en-SG" smtClean="0"/>
-              <a:t>22/7/2026</a:t>
+              <a:t>2/8/2026</a:t>
             </a:fld>
             <a:endParaRPr lang="en-SG" dirty="0"/>
           </a:p>
@@ -3658,7 +3658,7 @@
           <a:p>
             <a:fld id="{4C356D4C-ADF5-4911-B329-3D82610630F0}" type="datetimeFigureOut">
               <a:rPr lang="en-SG" smtClean="0"/>
-              <a:t>22/7/2026</a:t>
+              <a:t>2/8/2026</a:t>
             </a:fld>
             <a:endParaRPr lang="en-SG" dirty="0"/>
           </a:p>
@@ -3771,7 +3771,7 @@
           <a:p>
             <a:fld id="{4C356D4C-ADF5-4911-B329-3D82610630F0}" type="datetimeFigureOut">
               <a:rPr lang="en-SG" smtClean="0"/>
-              <a:t>22/7/2026</a:t>
+              <a:t>2/8/2026</a:t>
             </a:fld>
             <a:endParaRPr lang="en-SG" dirty="0"/>
           </a:p>
@@ -4084,7 +4084,7 @@
           <a:p>
             <a:fld id="{4C356D4C-ADF5-4911-B329-3D82610630F0}" type="datetimeFigureOut">
               <a:rPr lang="en-SG" smtClean="0"/>
-              <a:t>22/7/2026</a:t>
+              <a:t>2/8/2026</a:t>
             </a:fld>
             <a:endParaRPr lang="en-SG" dirty="0"/>
           </a:p>
@@ -4373,7 +4373,7 @@
           <a:p>
             <a:fld id="{4C356D4C-ADF5-4911-B329-3D82610630F0}" type="datetimeFigureOut">
               <a:rPr lang="en-SG" smtClean="0"/>
-              <a:t>22/7/2026</a:t>
+              <a:t>2/8/2026</a:t>
             </a:fld>
             <a:endParaRPr lang="en-SG" dirty="0"/>
           </a:p>
@@ -4616,7 +4616,7 @@
           <a:p>
             <a:fld id="{4C356D4C-ADF5-4911-B329-3D82610630F0}" type="datetimeFigureOut">
               <a:rPr lang="en-SG" smtClean="0"/>
-              <a:t>22/7/2026</a:t>
+              <a:t>2/8/2026</a:t>
             </a:fld>
             <a:endParaRPr lang="en-SG" dirty="0"/>
           </a:p>
@@ -5056,7 +5056,7 @@
           <a:p>
             <a:r>
               <a:rPr lang="en-GB" dirty="0"/>
-              <a:t>T01/02/03_Group # __ </a:t>
+              <a:t>T01 Group 10</a:t>
             </a:r>
             <a:endParaRPr lang="en-SG" dirty="0"/>
           </a:p>
@@ -5085,7 +5085,13 @@
           <a:p>
             <a:r>
               <a:rPr lang="en-GB" dirty="0"/>
-              <a:t>Name of group members { Full name as appeared in Moodle}</a:t>
+              <a:t>Koh Ee Hui Joseph (Leader)</a:t>
+            </a:r>
+          </a:p>
+          <a:p>
+            <a:r>
+              <a:rPr lang="en-GB" dirty="0"/>
+              <a:t>…</a:t>
             </a:r>
           </a:p>
           <a:p>
